--- a/leebae_docent_final.pptx
+++ b/leebae_docent_final.pptx
@@ -3100,12 +3100,20 @@
         <p:nvPr/>
       </p:nvGrpSpPr>
       <p:grpSpPr/>
-      <p:sp>
-        <p:nvSpPr>
-          <p:cNvPr id="2" name="Rectangle 1"/>
-          <p:cNvSpPr/>
-          <p:nvPr/>
-        </p:nvSpPr>
+      <p:pic>
+        <p:nvPicPr>
+          <p:cNvPr id="2" name="Picture 1" descr="img_1.jpg"/>
+          <p:cNvPicPr>
+            <a:picLocks noChangeAspect="1"/>
+          </p:cNvPicPr>
+          <p:nvPr/>
+        </p:nvPicPr>
+        <p:blipFill>
+          <a:blip r:embed="rId2"/>
+          <a:stretch>
+            <a:fillRect/>
+          </a:stretch>
+        </p:blipFill>
         <p:spPr>
           <a:xfrm>
             <a:off x="4500000" y="0"/>
@@ -3114,13 +3122,29 @@
           <a:prstGeom prst="rect">
             <a:avLst/>
           </a:prstGeom>
+        </p:spPr>
+      </p:pic>
+      <p:sp>
+        <p:nvSpPr>
+          <p:cNvPr id="3" name="Rectangle 2"/>
+          <p:cNvSpPr/>
+          <p:nvPr/>
+        </p:nvSpPr>
+        <p:spPr>
+          <a:xfrm>
+            <a:off x="4500000" y="0"/>
+            <a:ext cx="4644000" cy="5143500"/>
+          </a:xfrm>
+          <a:prstGeom prst="rect">
+            <a:avLst/>
+          </a:prstGeom>
           <a:solidFill>
-            <a:srgbClr val="1E1E1E"/>
+            <a:srgbClr val="111111">
+              <a:alpha val="60000"/>
+            </a:srgbClr>
           </a:solidFill>
-          <a:ln w="12700">
-            <a:solidFill>
-              <a:srgbClr val="333333"/>
-            </a:solidFill>
+          <a:ln>
+            <a:noFill/>
           </a:ln>
         </p:spPr>
         <p:style>
@@ -3142,41 +3166,6 @@
           <a:lstStyle/>
           <a:p>
             <a:pPr algn="ctr"/>
-          </a:p>
-        </p:txBody>
-      </p:sp>
-      <p:sp>
-        <p:nvSpPr>
-          <p:cNvPr id="3" name="TextBox 2"/>
-          <p:cNvSpPr txBox="1"/>
-          <p:nvPr/>
-        </p:nvSpPr>
-        <p:spPr>
-          <a:xfrm>
-            <a:off x="4500000" y="2471750"/>
-            <a:ext cx="4644000" cy="200000"/>
-          </a:xfrm>
-          <a:prstGeom prst="rect">
-            <a:avLst/>
-          </a:prstGeom>
-          <a:noFill/>
-        </p:spPr>
-        <p:txBody>
-          <a:bodyPr wrap="square" anchor="ctr" lIns="0" tIns="0" rIns="0" bIns="0">
-            <a:spAutoFit/>
-          </a:bodyPr>
-          <a:lstStyle/>
-          <a:p>
-            <a:pPr algn="ctr"/>
-            <a:r>
-              <a:rPr sz="1000" b="0" i="0">
-                <a:solidFill>
-                  <a:srgbClr val="555555"/>
-                </a:solidFill>
-                <a:latin typeface="Calibri"/>
-              </a:rPr>
-              <a:t>[ 이배 작품 이미지 ]</a:t>
-            </a:r>
           </a:p>
         </p:txBody>
       </p:sp>
@@ -3717,12 +3706,20 @@
         <p:nvPr/>
       </p:nvGrpSpPr>
       <p:grpSpPr/>
-      <p:sp>
-        <p:nvSpPr>
-          <p:cNvPr id="2" name="Rectangle 1"/>
-          <p:cNvSpPr/>
-          <p:nvPr/>
-        </p:nvSpPr>
+      <p:pic>
+        <p:nvPicPr>
+          <p:cNvPr id="2" name="Picture 1" descr="img_7.jpg"/>
+          <p:cNvPicPr>
+            <a:picLocks noChangeAspect="1"/>
+          </p:cNvPicPr>
+          <p:nvPr/>
+        </p:nvPicPr>
+        <p:blipFill>
+          <a:blip r:embed="rId2"/>
+          <a:stretch>
+            <a:fillRect/>
+          </a:stretch>
+        </p:blipFill>
         <p:spPr>
           <a:xfrm>
             <a:off x="6100000" y="300000"/>
@@ -3731,75 +3728,11 @@
           <a:prstGeom prst="rect">
             <a:avLst/>
           </a:prstGeom>
-          <a:solidFill>
-            <a:srgbClr val="1E1E1E"/>
-          </a:solidFill>
-          <a:ln w="12700">
-            <a:solidFill>
-              <a:srgbClr val="333333"/>
-            </a:solidFill>
-          </a:ln>
-        </p:spPr>
-        <p:style>
-          <a:lnRef idx="1">
-            <a:schemeClr val="accent1"/>
-          </a:lnRef>
-          <a:fillRef idx="3">
-            <a:schemeClr val="accent1"/>
-          </a:fillRef>
-          <a:effectRef idx="2">
-            <a:schemeClr val="accent1"/>
-          </a:effectRef>
-          <a:fontRef idx="minor">
-            <a:schemeClr val="lt1"/>
-          </a:fontRef>
-        </p:style>
-        <p:txBody>
-          <a:bodyPr rtlCol="0" anchor="ctr"/>
-          <a:lstStyle/>
-          <a:p>
-            <a:pPr algn="ctr"/>
-          </a:p>
-        </p:txBody>
-      </p:sp>
-      <p:sp>
-        <p:nvSpPr>
-          <p:cNvPr id="3" name="TextBox 2"/>
-          <p:cNvSpPr txBox="1"/>
-          <p:nvPr/>
-        </p:nvSpPr>
-        <p:spPr>
-          <a:xfrm>
-            <a:off x="6100000" y="2500000"/>
-            <a:ext cx="3044000" cy="200000"/>
-          </a:xfrm>
-          <a:prstGeom prst="rect">
-            <a:avLst/>
-          </a:prstGeom>
-          <a:noFill/>
-        </p:spPr>
-        <p:txBody>
-          <a:bodyPr wrap="square" anchor="ctr" lIns="0" tIns="0" rIns="0" bIns="0">
-            <a:spAutoFit/>
-          </a:bodyPr>
-          <a:lstStyle/>
-          <a:p>
-            <a:pPr algn="ctr"/>
-            <a:r>
-              <a:rPr sz="1000" b="0" i="0">
-                <a:solidFill>
-                  <a:srgbClr val="555555"/>
-                </a:solidFill>
-                <a:latin typeface="Calibri"/>
-              </a:rPr>
-              <a:t>[ 작가 사진 ]</a:t>
-            </a:r>
-          </a:p>
-        </p:txBody>
-      </p:sp>
-      <p:sp>
-        <p:nvSpPr>
-          <p:cNvPr id="4" name="Rectangle 3"/>
+        </p:spPr>
+      </p:pic>
+      <p:sp>
+        <p:nvSpPr>
+          <p:cNvPr id="3" name="Rectangle 2"/>
           <p:cNvSpPr/>
           <p:nvPr/>
         </p:nvSpPr>
@@ -3842,7 +3775,7 @@
       </p:sp>
       <p:sp>
         <p:nvSpPr>
-          <p:cNvPr id="5" name="TextBox 4"/>
+          <p:cNvPr id="4" name="TextBox 3"/>
           <p:cNvSpPr txBox="1"/>
           <p:nvPr/>
         </p:nvSpPr>
@@ -3877,7 +3810,7 @@
       </p:sp>
       <p:sp>
         <p:nvSpPr>
-          <p:cNvPr id="6" name="TextBox 5"/>
+          <p:cNvPr id="5" name="TextBox 4"/>
           <p:cNvSpPr txBox="1"/>
           <p:nvPr/>
         </p:nvSpPr>
@@ -3912,7 +3845,7 @@
       </p:sp>
       <p:sp>
         <p:nvSpPr>
-          <p:cNvPr id="7" name="Rectangle 6"/>
+          <p:cNvPr id="6" name="Rectangle 5"/>
           <p:cNvSpPr/>
           <p:nvPr/>
         </p:nvSpPr>
@@ -3957,7 +3890,7 @@
       </p:sp>
       <p:sp>
         <p:nvSpPr>
-          <p:cNvPr id="8" name="TextBox 7"/>
+          <p:cNvPr id="7" name="TextBox 6"/>
           <p:cNvSpPr txBox="1"/>
           <p:nvPr/>
         </p:nvSpPr>
@@ -3992,7 +3925,7 @@
       </p:sp>
       <p:sp>
         <p:nvSpPr>
-          <p:cNvPr id="9" name="TextBox 8"/>
+          <p:cNvPr id="8" name="TextBox 7"/>
           <p:cNvSpPr txBox="1"/>
           <p:nvPr/>
         </p:nvSpPr>
@@ -4027,7 +3960,7 @@
       </p:sp>
       <p:sp>
         <p:nvSpPr>
-          <p:cNvPr id="10" name="TextBox 9"/>
+          <p:cNvPr id="9" name="TextBox 8"/>
           <p:cNvSpPr txBox="1"/>
           <p:nvPr/>
         </p:nvSpPr>
@@ -4062,7 +3995,7 @@
       </p:sp>
       <p:sp>
         <p:nvSpPr>
-          <p:cNvPr id="11" name="TextBox 10"/>
+          <p:cNvPr id="10" name="TextBox 9"/>
           <p:cNvSpPr txBox="1"/>
           <p:nvPr/>
         </p:nvSpPr>
@@ -4097,7 +4030,7 @@
       </p:sp>
       <p:sp>
         <p:nvSpPr>
-          <p:cNvPr id="12" name="TextBox 11"/>
+          <p:cNvPr id="11" name="TextBox 10"/>
           <p:cNvSpPr txBox="1"/>
           <p:nvPr/>
         </p:nvSpPr>
@@ -4132,7 +4065,7 @@
       </p:sp>
       <p:sp>
         <p:nvSpPr>
-          <p:cNvPr id="13" name="TextBox 12"/>
+          <p:cNvPr id="12" name="TextBox 11"/>
           <p:cNvSpPr txBox="1"/>
           <p:nvPr/>
         </p:nvSpPr>
@@ -4167,7 +4100,7 @@
       </p:sp>
       <p:sp>
         <p:nvSpPr>
-          <p:cNvPr id="14" name="TextBox 13"/>
+          <p:cNvPr id="13" name="TextBox 12"/>
           <p:cNvSpPr txBox="1"/>
           <p:nvPr/>
         </p:nvSpPr>
@@ -4202,7 +4135,7 @@
       </p:sp>
       <p:sp>
         <p:nvSpPr>
-          <p:cNvPr id="15" name="TextBox 14"/>
+          <p:cNvPr id="14" name="TextBox 13"/>
           <p:cNvSpPr txBox="1"/>
           <p:nvPr/>
         </p:nvSpPr>
@@ -4237,7 +4170,7 @@
       </p:sp>
       <p:sp>
         <p:nvSpPr>
-          <p:cNvPr id="16" name="TextBox 15"/>
+          <p:cNvPr id="15" name="TextBox 14"/>
           <p:cNvSpPr txBox="1"/>
           <p:nvPr/>
         </p:nvSpPr>
@@ -4272,7 +4205,7 @@
       </p:sp>
       <p:sp>
         <p:nvSpPr>
-          <p:cNvPr id="17" name="TextBox 16"/>
+          <p:cNvPr id="16" name="TextBox 15"/>
           <p:cNvSpPr txBox="1"/>
           <p:nvPr/>
         </p:nvSpPr>
@@ -4307,7 +4240,7 @@
       </p:sp>
       <p:sp>
         <p:nvSpPr>
-          <p:cNvPr id="18" name="TextBox 17"/>
+          <p:cNvPr id="17" name="TextBox 16"/>
           <p:cNvSpPr txBox="1"/>
           <p:nvPr/>
         </p:nvSpPr>
@@ -4342,7 +4275,7 @@
       </p:sp>
       <p:sp>
         <p:nvSpPr>
-          <p:cNvPr id="19" name="TextBox 18"/>
+          <p:cNvPr id="18" name="TextBox 17"/>
           <p:cNvSpPr txBox="1"/>
           <p:nvPr/>
         </p:nvSpPr>
@@ -4436,9 +4369,12 @@
   <p:cSld>
     <p:bg>
       <p:bgPr>
-        <a:solidFill>
-          <a:srgbClr val="0D0D0D"/>
-        </a:solidFill>
+        <a:blipFill dpi="0" rotWithShape="1">
+          <a:blip r:embed="rId2"/>
+          <a:stretch>
+            <a:fillRect/>
+          </a:stretch>
+        </a:blipFill>
       </p:bgPr>
     </p:bg>
     <p:spTree>
@@ -4463,7 +4399,9 @@
             <a:avLst/>
           </a:prstGeom>
           <a:solidFill>
-            <a:srgbClr val="0D0D0D"/>
+            <a:srgbClr val="0D0D0D">
+              <a:alpha val="90000"/>
+            </a:srgbClr>
           </a:solidFill>
           <a:ln>
             <a:noFill/>
@@ -5188,9 +5126,12 @@
   <p:cSld>
     <p:bg>
       <p:bgPr>
-        <a:solidFill>
-          <a:srgbClr val="0A0A0A"/>
-        </a:solidFill>
+        <a:blipFill dpi="0" rotWithShape="1">
+          <a:blip r:embed="rId2"/>
+          <a:stretch>
+            <a:fillRect/>
+          </a:stretch>
+        </a:blipFill>
       </p:bgPr>
     </p:bg>
     <p:spTree>
@@ -5215,7 +5156,9 @@
             <a:avLst/>
           </a:prstGeom>
           <a:solidFill>
-            <a:srgbClr val="0D0D0D"/>
+            <a:srgbClr val="0D0D0D">
+              <a:alpha val="92000"/>
+            </a:srgbClr>
           </a:solidFill>
           <a:ln>
             <a:noFill/>
@@ -5280,7 +5223,52 @@
       </p:sp>
       <p:sp>
         <p:nvSpPr>
-          <p:cNvPr id="4" name="TextBox 3"/>
+          <p:cNvPr id="4" name="Rectangle 3"/>
+          <p:cNvSpPr/>
+          <p:nvPr/>
+        </p:nvSpPr>
+        <p:spPr>
+          <a:xfrm>
+            <a:off x="0" y="502920"/>
+            <a:ext cx="9144000" cy="4640580"/>
+          </a:xfrm>
+          <a:prstGeom prst="rect">
+            <a:avLst/>
+          </a:prstGeom>
+          <a:solidFill>
+            <a:srgbClr val="0A0A0A">
+              <a:alpha val="75000"/>
+            </a:srgbClr>
+          </a:solidFill>
+          <a:ln>
+            <a:noFill/>
+          </a:ln>
+        </p:spPr>
+        <p:style>
+          <a:lnRef idx="1">
+            <a:schemeClr val="accent1"/>
+          </a:lnRef>
+          <a:fillRef idx="3">
+            <a:schemeClr val="accent1"/>
+          </a:fillRef>
+          <a:effectRef idx="2">
+            <a:schemeClr val="accent1"/>
+          </a:effectRef>
+          <a:fontRef idx="minor">
+            <a:schemeClr val="lt1"/>
+          </a:fontRef>
+        </p:style>
+        <p:txBody>
+          <a:bodyPr rtlCol="0" anchor="ctr"/>
+          <a:lstStyle/>
+          <a:p>
+            <a:pPr algn="ctr"/>
+          </a:p>
+        </p:txBody>
+      </p:sp>
+      <p:sp>
+        <p:nvSpPr>
+          <p:cNvPr id="5" name="TextBox 4"/>
           <p:cNvSpPr txBox="1"/>
           <p:nvPr/>
         </p:nvSpPr>
@@ -5315,7 +5303,7 @@
       </p:sp>
       <p:sp>
         <p:nvSpPr>
-          <p:cNvPr id="5" name="Rectangle 4"/>
+          <p:cNvPr id="6" name="Rectangle 5"/>
           <p:cNvSpPr/>
           <p:nvPr/>
         </p:nvSpPr>
@@ -5360,7 +5348,7 @@
       </p:sp>
       <p:sp>
         <p:nvSpPr>
-          <p:cNvPr id="6" name="Rectangle 5"/>
+          <p:cNvPr id="7" name="Rectangle 6"/>
           <p:cNvSpPr/>
           <p:nvPr/>
         </p:nvSpPr>
@@ -5403,7 +5391,7 @@
       </p:sp>
       <p:sp>
         <p:nvSpPr>
-          <p:cNvPr id="7" name="TextBox 6"/>
+          <p:cNvPr id="8" name="TextBox 7"/>
           <p:cNvSpPr txBox="1"/>
           <p:nvPr/>
         </p:nvSpPr>
@@ -5438,7 +5426,7 @@
       </p:sp>
       <p:sp>
         <p:nvSpPr>
-          <p:cNvPr id="8" name="TextBox 7"/>
+          <p:cNvPr id="9" name="TextBox 8"/>
           <p:cNvSpPr txBox="1"/>
           <p:nvPr/>
         </p:nvSpPr>
@@ -5473,7 +5461,7 @@
       </p:sp>
       <p:sp>
         <p:nvSpPr>
-          <p:cNvPr id="9" name="TextBox 8"/>
+          <p:cNvPr id="10" name="TextBox 9"/>
           <p:cNvSpPr txBox="1"/>
           <p:nvPr/>
         </p:nvSpPr>
@@ -5508,7 +5496,7 @@
       </p:sp>
       <p:sp>
         <p:nvSpPr>
-          <p:cNvPr id="10" name="TextBox 9"/>
+          <p:cNvPr id="11" name="TextBox 10"/>
           <p:cNvSpPr txBox="1"/>
           <p:nvPr/>
         </p:nvSpPr>
@@ -5544,7 +5532,7 @@
       </p:sp>
       <p:sp>
         <p:nvSpPr>
-          <p:cNvPr id="11" name="Rectangle 10"/>
+          <p:cNvPr id="12" name="Rectangle 11"/>
           <p:cNvSpPr/>
           <p:nvPr/>
         </p:nvSpPr>
@@ -5589,7 +5577,7 @@
       </p:sp>
       <p:sp>
         <p:nvSpPr>
-          <p:cNvPr id="12" name="Rectangle 11"/>
+          <p:cNvPr id="13" name="Rectangle 12"/>
           <p:cNvSpPr/>
           <p:nvPr/>
         </p:nvSpPr>
@@ -5632,7 +5620,7 @@
       </p:sp>
       <p:sp>
         <p:nvSpPr>
-          <p:cNvPr id="13" name="TextBox 12"/>
+          <p:cNvPr id="14" name="TextBox 13"/>
           <p:cNvSpPr txBox="1"/>
           <p:nvPr/>
         </p:nvSpPr>
@@ -5667,7 +5655,7 @@
       </p:sp>
       <p:sp>
         <p:nvSpPr>
-          <p:cNvPr id="14" name="TextBox 13"/>
+          <p:cNvPr id="15" name="TextBox 14"/>
           <p:cNvSpPr txBox="1"/>
           <p:nvPr/>
         </p:nvSpPr>
@@ -5702,7 +5690,7 @@
       </p:sp>
       <p:sp>
         <p:nvSpPr>
-          <p:cNvPr id="15" name="TextBox 14"/>
+          <p:cNvPr id="16" name="TextBox 15"/>
           <p:cNvSpPr txBox="1"/>
           <p:nvPr/>
         </p:nvSpPr>
@@ -5737,7 +5725,7 @@
       </p:sp>
       <p:sp>
         <p:nvSpPr>
-          <p:cNvPr id="16" name="TextBox 15"/>
+          <p:cNvPr id="17" name="TextBox 16"/>
           <p:cNvSpPr txBox="1"/>
           <p:nvPr/>
         </p:nvSpPr>
@@ -5773,7 +5761,7 @@
       </p:sp>
       <p:sp>
         <p:nvSpPr>
-          <p:cNvPr id="17" name="Rectangle 16"/>
+          <p:cNvPr id="18" name="Rectangle 17"/>
           <p:cNvSpPr/>
           <p:nvPr/>
         </p:nvSpPr>
@@ -5818,7 +5806,7 @@
       </p:sp>
       <p:sp>
         <p:nvSpPr>
-          <p:cNvPr id="18" name="Rectangle 17"/>
+          <p:cNvPr id="19" name="Rectangle 18"/>
           <p:cNvSpPr/>
           <p:nvPr/>
         </p:nvSpPr>
@@ -5861,7 +5849,7 @@
       </p:sp>
       <p:sp>
         <p:nvSpPr>
-          <p:cNvPr id="19" name="TextBox 18"/>
+          <p:cNvPr id="20" name="TextBox 19"/>
           <p:cNvSpPr txBox="1"/>
           <p:nvPr/>
         </p:nvSpPr>
@@ -5896,7 +5884,7 @@
       </p:sp>
       <p:sp>
         <p:nvSpPr>
-          <p:cNvPr id="20" name="TextBox 19"/>
+          <p:cNvPr id="21" name="TextBox 20"/>
           <p:cNvSpPr txBox="1"/>
           <p:nvPr/>
         </p:nvSpPr>
@@ -5931,7 +5919,7 @@
       </p:sp>
       <p:sp>
         <p:nvSpPr>
-          <p:cNvPr id="21" name="TextBox 20"/>
+          <p:cNvPr id="22" name="TextBox 21"/>
           <p:cNvSpPr txBox="1"/>
           <p:nvPr/>
         </p:nvSpPr>
@@ -5966,7 +5954,7 @@
       </p:sp>
       <p:sp>
         <p:nvSpPr>
-          <p:cNvPr id="22" name="TextBox 21"/>
+          <p:cNvPr id="23" name="TextBox 22"/>
           <p:cNvSpPr txBox="1"/>
           <p:nvPr/>
         </p:nvSpPr>
@@ -6002,7 +5990,7 @@
       </p:sp>
       <p:sp>
         <p:nvSpPr>
-          <p:cNvPr id="23" name="Rectangle 22"/>
+          <p:cNvPr id="24" name="Rectangle 23"/>
           <p:cNvSpPr/>
           <p:nvPr/>
         </p:nvSpPr>
@@ -6047,7 +6035,7 @@
       </p:sp>
       <p:sp>
         <p:nvSpPr>
-          <p:cNvPr id="24" name="Rectangle 23"/>
+          <p:cNvPr id="25" name="Rectangle 24"/>
           <p:cNvSpPr/>
           <p:nvPr/>
         </p:nvSpPr>
@@ -6090,7 +6078,7 @@
       </p:sp>
       <p:sp>
         <p:nvSpPr>
-          <p:cNvPr id="25" name="TextBox 24"/>
+          <p:cNvPr id="26" name="TextBox 25"/>
           <p:cNvSpPr txBox="1"/>
           <p:nvPr/>
         </p:nvSpPr>
@@ -6125,7 +6113,7 @@
       </p:sp>
       <p:sp>
         <p:nvSpPr>
-          <p:cNvPr id="26" name="TextBox 25"/>
+          <p:cNvPr id="27" name="TextBox 26"/>
           <p:cNvSpPr txBox="1"/>
           <p:nvPr/>
         </p:nvSpPr>
@@ -6160,7 +6148,7 @@
       </p:sp>
       <p:sp>
         <p:nvSpPr>
-          <p:cNvPr id="27" name="TextBox 26"/>
+          <p:cNvPr id="28" name="TextBox 27"/>
           <p:cNvSpPr txBox="1"/>
           <p:nvPr/>
         </p:nvSpPr>
@@ -6195,7 +6183,7 @@
       </p:sp>
       <p:sp>
         <p:nvSpPr>
-          <p:cNvPr id="28" name="TextBox 27"/>
+          <p:cNvPr id="29" name="TextBox 28"/>
           <p:cNvSpPr txBox="1"/>
           <p:nvPr/>
         </p:nvSpPr>
@@ -6231,7 +6219,7 @@
       </p:sp>
       <p:sp>
         <p:nvSpPr>
-          <p:cNvPr id="29" name="Rectangle 28"/>
+          <p:cNvPr id="30" name="Rectangle 29"/>
           <p:cNvSpPr/>
           <p:nvPr/>
         </p:nvSpPr>
@@ -6276,7 +6264,7 @@
       </p:sp>
       <p:sp>
         <p:nvSpPr>
-          <p:cNvPr id="30" name="Rectangle 29"/>
+          <p:cNvPr id="31" name="Rectangle 30"/>
           <p:cNvSpPr/>
           <p:nvPr/>
         </p:nvSpPr>
@@ -6319,7 +6307,7 @@
       </p:sp>
       <p:sp>
         <p:nvSpPr>
-          <p:cNvPr id="31" name="TextBox 30"/>
+          <p:cNvPr id="32" name="TextBox 31"/>
           <p:cNvSpPr txBox="1"/>
           <p:nvPr/>
         </p:nvSpPr>
@@ -6354,7 +6342,7 @@
       </p:sp>
       <p:sp>
         <p:nvSpPr>
-          <p:cNvPr id="32" name="TextBox 31"/>
+          <p:cNvPr id="33" name="TextBox 32"/>
           <p:cNvSpPr txBox="1"/>
           <p:nvPr/>
         </p:nvSpPr>
@@ -6389,7 +6377,7 @@
       </p:sp>
       <p:sp>
         <p:nvSpPr>
-          <p:cNvPr id="33" name="TextBox 32"/>
+          <p:cNvPr id="34" name="TextBox 33"/>
           <p:cNvSpPr txBox="1"/>
           <p:nvPr/>
         </p:nvSpPr>
@@ -6424,7 +6412,7 @@
       </p:sp>
       <p:sp>
         <p:nvSpPr>
-          <p:cNvPr id="34" name="TextBox 33"/>
+          <p:cNvPr id="35" name="TextBox 34"/>
           <p:cNvSpPr txBox="1"/>
           <p:nvPr/>
         </p:nvSpPr>
@@ -6460,7 +6448,7 @@
       </p:sp>
       <p:sp>
         <p:nvSpPr>
-          <p:cNvPr id="35" name="Rectangle 34"/>
+          <p:cNvPr id="36" name="Rectangle 35"/>
           <p:cNvSpPr/>
           <p:nvPr/>
         </p:nvSpPr>
@@ -6505,7 +6493,7 @@
       </p:sp>
       <p:sp>
         <p:nvSpPr>
-          <p:cNvPr id="36" name="Rectangle 35"/>
+          <p:cNvPr id="37" name="Rectangle 36"/>
           <p:cNvSpPr/>
           <p:nvPr/>
         </p:nvSpPr>
@@ -6548,7 +6536,7 @@
       </p:sp>
       <p:sp>
         <p:nvSpPr>
-          <p:cNvPr id="37" name="TextBox 36"/>
+          <p:cNvPr id="38" name="TextBox 37"/>
           <p:cNvSpPr txBox="1"/>
           <p:nvPr/>
         </p:nvSpPr>
@@ -6583,7 +6571,7 @@
       </p:sp>
       <p:sp>
         <p:nvSpPr>
-          <p:cNvPr id="38" name="TextBox 37"/>
+          <p:cNvPr id="39" name="TextBox 38"/>
           <p:cNvSpPr txBox="1"/>
           <p:nvPr/>
         </p:nvSpPr>
@@ -6618,7 +6606,7 @@
       </p:sp>
       <p:sp>
         <p:nvSpPr>
-          <p:cNvPr id="39" name="TextBox 38"/>
+          <p:cNvPr id="40" name="TextBox 39"/>
           <p:cNvSpPr txBox="1"/>
           <p:nvPr/>
         </p:nvSpPr>
@@ -6653,7 +6641,7 @@
       </p:sp>
       <p:sp>
         <p:nvSpPr>
-          <p:cNvPr id="40" name="TextBox 39"/>
+          <p:cNvPr id="41" name="TextBox 40"/>
           <p:cNvSpPr txBox="1"/>
           <p:nvPr/>
         </p:nvSpPr>
@@ -6700,9 +6688,12 @@
   <p:cSld>
     <p:bg>
       <p:bgPr>
-        <a:solidFill>
-          <a:srgbClr val="0F0F0F"/>
-        </a:solidFill>
+        <a:blipFill dpi="0" rotWithShape="1">
+          <a:blip r:embed="rId2"/>
+          <a:stretch>
+            <a:fillRect/>
+          </a:stretch>
+        </a:blipFill>
       </p:bgPr>
     </p:bg>
     <p:spTree>
@@ -6727,7 +6718,9 @@
             <a:avLst/>
           </a:prstGeom>
           <a:solidFill>
-            <a:srgbClr val="1A1A1A"/>
+            <a:srgbClr val="1A1A1A">
+              <a:alpha val="90000"/>
+            </a:srgbClr>
           </a:solidFill>
           <a:ln>
             <a:noFill/>
@@ -6793,86 +6786,6 @@
       <p:sp>
         <p:nvSpPr>
           <p:cNvPr id="4" name="Rectangle 3"/>
-          <p:cNvSpPr/>
-          <p:nvPr/>
-        </p:nvSpPr>
-        <p:spPr>
-          <a:xfrm>
-            <a:off x="4600000" y="500000"/>
-            <a:ext cx="4400000" cy="4500000"/>
-          </a:xfrm>
-          <a:prstGeom prst="rect">
-            <a:avLst/>
-          </a:prstGeom>
-          <a:solidFill>
-            <a:srgbClr val="1E1E1E"/>
-          </a:solidFill>
-          <a:ln w="12700">
-            <a:solidFill>
-              <a:srgbClr val="333333"/>
-            </a:solidFill>
-          </a:ln>
-        </p:spPr>
-        <p:style>
-          <a:lnRef idx="1">
-            <a:schemeClr val="accent1"/>
-          </a:lnRef>
-          <a:fillRef idx="3">
-            <a:schemeClr val="accent1"/>
-          </a:fillRef>
-          <a:effectRef idx="2">
-            <a:schemeClr val="accent1"/>
-          </a:effectRef>
-          <a:fontRef idx="minor">
-            <a:schemeClr val="lt1"/>
-          </a:fontRef>
-        </p:style>
-        <p:txBody>
-          <a:bodyPr rtlCol="0" anchor="ctr"/>
-          <a:lstStyle/>
-          <a:p>
-            <a:pPr algn="ctr"/>
-          </a:p>
-        </p:txBody>
-      </p:sp>
-      <p:sp>
-        <p:nvSpPr>
-          <p:cNvPr id="5" name="TextBox 4"/>
-          <p:cNvSpPr txBox="1"/>
-          <p:nvPr/>
-        </p:nvSpPr>
-        <p:spPr>
-          <a:xfrm>
-            <a:off x="4600000" y="2650000"/>
-            <a:ext cx="4400000" cy="200000"/>
-          </a:xfrm>
-          <a:prstGeom prst="rect">
-            <a:avLst/>
-          </a:prstGeom>
-          <a:noFill/>
-        </p:spPr>
-        <p:txBody>
-          <a:bodyPr wrap="square" anchor="ctr" lIns="0" tIns="0" rIns="0" bIns="0">
-            <a:spAutoFit/>
-          </a:bodyPr>
-          <a:lstStyle/>
-          <a:p>
-            <a:pPr algn="ctr"/>
-            <a:r>
-              <a:rPr sz="1000" b="0" i="0">
-                <a:solidFill>
-                  <a:srgbClr val="555555"/>
-                </a:solidFill>
-                <a:latin typeface="Calibri"/>
-              </a:rPr>
-              <a:t>[ 전시 이미지 ]</a:t>
-            </a:r>
-          </a:p>
-        </p:txBody>
-      </p:sp>
-      <p:sp>
-        <p:nvSpPr>
-          <p:cNvPr id="6" name="Rectangle 5"/>
           <p:cNvSpPr/>
           <p:nvPr/>
         </p:nvSpPr>
@@ -6917,7 +6830,7 @@
       </p:sp>
       <p:sp>
         <p:nvSpPr>
-          <p:cNvPr id="7" name="TextBox 6"/>
+          <p:cNvPr id="5" name="TextBox 4"/>
           <p:cNvSpPr txBox="1"/>
           <p:nvPr/>
         </p:nvSpPr>
@@ -6952,7 +6865,7 @@
       </p:sp>
       <p:sp>
         <p:nvSpPr>
-          <p:cNvPr id="8" name="Rectangle 7"/>
+          <p:cNvPr id="6" name="Rectangle 5"/>
           <p:cNvSpPr/>
           <p:nvPr/>
         </p:nvSpPr>
@@ -6995,7 +6908,7 @@
       </p:sp>
       <p:sp>
         <p:nvSpPr>
-          <p:cNvPr id="9" name="TextBox 8"/>
+          <p:cNvPr id="7" name="TextBox 6"/>
           <p:cNvSpPr txBox="1"/>
           <p:nvPr/>
         </p:nvSpPr>
@@ -7031,7 +6944,7 @@
       </p:sp>
       <p:sp>
         <p:nvSpPr>
-          <p:cNvPr id="10" name="TextBox 9"/>
+          <p:cNvPr id="8" name="TextBox 7"/>
           <p:cNvSpPr txBox="1"/>
           <p:nvPr/>
         </p:nvSpPr>
@@ -7066,7 +6979,7 @@
       </p:sp>
       <p:sp>
         <p:nvSpPr>
-          <p:cNvPr id="11" name="Rectangle 10"/>
+          <p:cNvPr id="9" name="Rectangle 8"/>
           <p:cNvSpPr/>
           <p:nvPr/>
         </p:nvSpPr>
@@ -7111,7 +7024,7 @@
       </p:sp>
       <p:sp>
         <p:nvSpPr>
-          <p:cNvPr id="12" name="TextBox 11"/>
+          <p:cNvPr id="10" name="TextBox 9"/>
           <p:cNvSpPr txBox="1"/>
           <p:nvPr/>
         </p:nvSpPr>
@@ -7146,7 +7059,7 @@
       </p:sp>
       <p:sp>
         <p:nvSpPr>
-          <p:cNvPr id="13" name="Rectangle 12"/>
+          <p:cNvPr id="11" name="Rectangle 10"/>
           <p:cNvSpPr/>
           <p:nvPr/>
         </p:nvSpPr>
@@ -7193,7 +7106,7 @@
       </p:sp>
       <p:sp>
         <p:nvSpPr>
-          <p:cNvPr id="14" name="Rectangle 13"/>
+          <p:cNvPr id="12" name="Rectangle 11"/>
           <p:cNvSpPr/>
           <p:nvPr/>
         </p:nvSpPr>
@@ -7236,7 +7149,7 @@
       </p:sp>
       <p:sp>
         <p:nvSpPr>
-          <p:cNvPr id="15" name="TextBox 14"/>
+          <p:cNvPr id="13" name="TextBox 12"/>
           <p:cNvSpPr txBox="1"/>
           <p:nvPr/>
         </p:nvSpPr>
@@ -7271,7 +7184,7 @@
       </p:sp>
       <p:sp>
         <p:nvSpPr>
-          <p:cNvPr id="16" name="TextBox 15"/>
+          <p:cNvPr id="14" name="TextBox 13"/>
           <p:cNvSpPr txBox="1"/>
           <p:nvPr/>
         </p:nvSpPr>
@@ -7306,7 +7219,7 @@
       </p:sp>
       <p:sp>
         <p:nvSpPr>
-          <p:cNvPr id="17" name="TextBox 16"/>
+          <p:cNvPr id="15" name="TextBox 14"/>
           <p:cNvSpPr txBox="1"/>
           <p:nvPr/>
         </p:nvSpPr>
@@ -7341,7 +7254,7 @@
       </p:sp>
       <p:sp>
         <p:nvSpPr>
-          <p:cNvPr id="18" name="Rectangle 17"/>
+          <p:cNvPr id="16" name="Rectangle 15"/>
           <p:cNvSpPr/>
           <p:nvPr/>
         </p:nvSpPr>
@@ -7388,7 +7301,7 @@
       </p:sp>
       <p:sp>
         <p:nvSpPr>
-          <p:cNvPr id="19" name="Rectangle 18"/>
+          <p:cNvPr id="17" name="Rectangle 16"/>
           <p:cNvSpPr/>
           <p:nvPr/>
         </p:nvSpPr>
@@ -7431,7 +7344,7 @@
       </p:sp>
       <p:sp>
         <p:nvSpPr>
-          <p:cNvPr id="20" name="TextBox 19"/>
+          <p:cNvPr id="18" name="TextBox 17"/>
           <p:cNvSpPr txBox="1"/>
           <p:nvPr/>
         </p:nvSpPr>
@@ -7466,7 +7379,7 @@
       </p:sp>
       <p:sp>
         <p:nvSpPr>
-          <p:cNvPr id="21" name="TextBox 20"/>
+          <p:cNvPr id="19" name="TextBox 18"/>
           <p:cNvSpPr txBox="1"/>
           <p:nvPr/>
         </p:nvSpPr>
@@ -7501,7 +7414,7 @@
       </p:sp>
       <p:sp>
         <p:nvSpPr>
-          <p:cNvPr id="22" name="TextBox 21"/>
+          <p:cNvPr id="20" name="TextBox 19"/>
           <p:cNvSpPr txBox="1"/>
           <p:nvPr/>
         </p:nvSpPr>
@@ -7536,7 +7449,7 @@
       </p:sp>
       <p:sp>
         <p:nvSpPr>
-          <p:cNvPr id="23" name="Rectangle 22"/>
+          <p:cNvPr id="21" name="Rectangle 20"/>
           <p:cNvSpPr/>
           <p:nvPr/>
         </p:nvSpPr>
@@ -7583,7 +7496,7 @@
       </p:sp>
       <p:sp>
         <p:nvSpPr>
-          <p:cNvPr id="24" name="Rectangle 23"/>
+          <p:cNvPr id="22" name="Rectangle 21"/>
           <p:cNvSpPr/>
           <p:nvPr/>
         </p:nvSpPr>
@@ -7626,7 +7539,7 @@
       </p:sp>
       <p:sp>
         <p:nvSpPr>
-          <p:cNvPr id="25" name="TextBox 24"/>
+          <p:cNvPr id="23" name="TextBox 22"/>
           <p:cNvSpPr txBox="1"/>
           <p:nvPr/>
         </p:nvSpPr>
@@ -7661,7 +7574,7 @@
       </p:sp>
       <p:sp>
         <p:nvSpPr>
-          <p:cNvPr id="26" name="TextBox 25"/>
+          <p:cNvPr id="24" name="TextBox 23"/>
           <p:cNvSpPr txBox="1"/>
           <p:nvPr/>
         </p:nvSpPr>
@@ -7696,7 +7609,7 @@
       </p:sp>
       <p:sp>
         <p:nvSpPr>
-          <p:cNvPr id="27" name="TextBox 26"/>
+          <p:cNvPr id="25" name="TextBox 24"/>
           <p:cNvSpPr txBox="1"/>
           <p:nvPr/>
         </p:nvSpPr>
@@ -7840,12 +7753,20 @@
           </a:p>
         </p:txBody>
       </p:sp>
-      <p:sp>
-        <p:nvSpPr>
-          <p:cNvPr id="4" name="Rectangle 3"/>
-          <p:cNvSpPr/>
-          <p:nvPr/>
-        </p:nvSpPr>
+      <p:pic>
+        <p:nvPicPr>
+          <p:cNvPr id="4" name="Picture 3" descr="img_6.jpg"/>
+          <p:cNvPicPr>
+            <a:picLocks noChangeAspect="1"/>
+          </p:cNvPicPr>
+          <p:nvPr/>
+        </p:nvPicPr>
+        <p:blipFill>
+          <a:blip r:embed="rId2"/>
+          <a:stretch>
+            <a:fillRect/>
+          </a:stretch>
+        </p:blipFill>
         <p:spPr>
           <a:xfrm>
             <a:off x="5200000" y="600000"/>
@@ -7854,78 +7775,22 @@
           <a:prstGeom prst="rect">
             <a:avLst/>
           </a:prstGeom>
-          <a:solidFill>
-            <a:srgbClr val="1E1E1E"/>
-          </a:solidFill>
-          <a:ln w="12700">
-            <a:solidFill>
-              <a:srgbClr val="333333"/>
-            </a:solidFill>
-          </a:ln>
-        </p:spPr>
-        <p:style>
-          <a:lnRef idx="1">
-            <a:schemeClr val="accent1"/>
-          </a:lnRef>
-          <a:fillRef idx="3">
-            <a:schemeClr val="accent1"/>
-          </a:fillRef>
-          <a:effectRef idx="2">
-            <a:schemeClr val="accent1"/>
-          </a:effectRef>
-          <a:fontRef idx="minor">
-            <a:schemeClr val="lt1"/>
-          </a:fontRef>
-        </p:style>
-        <p:txBody>
-          <a:bodyPr rtlCol="0" anchor="ctr"/>
-          <a:lstStyle/>
-          <a:p>
-            <a:pPr algn="ctr"/>
-          </a:p>
-        </p:txBody>
-      </p:sp>
-      <p:sp>
-        <p:nvSpPr>
-          <p:cNvPr id="5" name="TextBox 4"/>
-          <p:cNvSpPr txBox="1"/>
-          <p:nvPr/>
-        </p:nvSpPr>
-        <p:spPr>
-          <a:xfrm>
-            <a:off x="5200000" y="2250000"/>
-            <a:ext cx="3700000" cy="200000"/>
-          </a:xfrm>
-          <a:prstGeom prst="rect">
-            <a:avLst/>
-          </a:prstGeom>
-          <a:noFill/>
-        </p:spPr>
-        <p:txBody>
-          <a:bodyPr wrap="square" anchor="ctr" lIns="0" tIns="0" rIns="0" bIns="0">
-            <a:spAutoFit/>
-          </a:bodyPr>
-          <a:lstStyle/>
-          <a:p>
-            <a:pPr algn="ctr"/>
-            <a:r>
-              <a:rPr sz="1000" b="0" i="0">
-                <a:solidFill>
-                  <a:srgbClr val="555555"/>
-                </a:solidFill>
-                <a:latin typeface="Calibri"/>
-              </a:rPr>
-              <a:t>[ 작품 이미지 ]</a:t>
-            </a:r>
-          </a:p>
-        </p:txBody>
-      </p:sp>
-      <p:sp>
-        <p:nvSpPr>
-          <p:cNvPr id="6" name="Rectangle 5"/>
-          <p:cNvSpPr/>
-          <p:nvPr/>
-        </p:nvSpPr>
+        </p:spPr>
+      </p:pic>
+      <p:pic>
+        <p:nvPicPr>
+          <p:cNvPr id="5" name="Picture 4" descr="img_3.jpg"/>
+          <p:cNvPicPr>
+            <a:picLocks noChangeAspect="1"/>
+          </p:cNvPicPr>
+          <p:nvPr/>
+        </p:nvPicPr>
+        <p:blipFill>
+          <a:blip r:embed="rId3"/>
+          <a:stretch>
+            <a:fillRect/>
+          </a:stretch>
+        </p:blipFill>
         <p:spPr>
           <a:xfrm>
             <a:off x="5200000" y="4100000"/>
@@ -7934,75 +7799,11 @@
           <a:prstGeom prst="rect">
             <a:avLst/>
           </a:prstGeom>
-          <a:solidFill>
-            <a:srgbClr val="1E1E1E"/>
-          </a:solidFill>
-          <a:ln w="12700">
-            <a:solidFill>
-              <a:srgbClr val="333333"/>
-            </a:solidFill>
-          </a:ln>
-        </p:spPr>
-        <p:style>
-          <a:lnRef idx="1">
-            <a:schemeClr val="accent1"/>
-          </a:lnRef>
-          <a:fillRef idx="3">
-            <a:schemeClr val="accent1"/>
-          </a:fillRef>
-          <a:effectRef idx="2">
-            <a:schemeClr val="accent1"/>
-          </a:effectRef>
-          <a:fontRef idx="minor">
-            <a:schemeClr val="lt1"/>
-          </a:fontRef>
-        </p:style>
-        <p:txBody>
-          <a:bodyPr rtlCol="0" anchor="ctr"/>
-          <a:lstStyle/>
-          <a:p>
-            <a:pPr algn="ctr"/>
-          </a:p>
-        </p:txBody>
-      </p:sp>
-      <p:sp>
-        <p:nvSpPr>
-          <p:cNvPr id="7" name="TextBox 6"/>
-          <p:cNvSpPr txBox="1"/>
-          <p:nvPr/>
-        </p:nvSpPr>
-        <p:spPr>
-          <a:xfrm>
-            <a:off x="5200000" y="4450000"/>
-            <a:ext cx="1800000" cy="200000"/>
-          </a:xfrm>
-          <a:prstGeom prst="rect">
-            <a:avLst/>
-          </a:prstGeom>
-          <a:noFill/>
-        </p:spPr>
-        <p:txBody>
-          <a:bodyPr wrap="square" anchor="ctr" lIns="0" tIns="0" rIns="0" bIns="0">
-            <a:spAutoFit/>
-          </a:bodyPr>
-          <a:lstStyle/>
-          <a:p>
-            <a:pPr algn="ctr"/>
-            <a:r>
-              <a:rPr sz="1000" b="0" i="0">
-                <a:solidFill>
-                  <a:srgbClr val="555555"/>
-                </a:solidFill>
-                <a:latin typeface="Calibri"/>
-              </a:rPr>
-              <a:t>[ 이미지 ]</a:t>
-            </a:r>
-          </a:p>
-        </p:txBody>
-      </p:sp>
-      <p:sp>
-        <p:nvSpPr>
-          <p:cNvPr id="8" name="TextBox 7"/>
+        </p:spPr>
+      </p:pic>
+      <p:sp>
+        <p:nvSpPr>
+          <p:cNvPr id="6" name="TextBox 5"/>
           <p:cNvSpPr txBox="1"/>
           <p:nvPr/>
         </p:nvSpPr>
@@ -8037,7 +7838,7 @@
       </p:sp>
       <p:sp>
         <p:nvSpPr>
-          <p:cNvPr id="9" name="TextBox 8"/>
+          <p:cNvPr id="7" name="TextBox 6"/>
           <p:cNvSpPr txBox="1"/>
           <p:nvPr/>
         </p:nvSpPr>
@@ -8072,7 +7873,7 @@
       </p:sp>
       <p:sp>
         <p:nvSpPr>
-          <p:cNvPr id="10" name="TextBox 9"/>
+          <p:cNvPr id="8" name="TextBox 7"/>
           <p:cNvSpPr txBox="1"/>
           <p:nvPr/>
         </p:nvSpPr>
@@ -8119,7 +7920,7 @@
       </p:sp>
       <p:sp>
         <p:nvSpPr>
-          <p:cNvPr id="11" name="Rectangle 10"/>
+          <p:cNvPr id="9" name="Rectangle 8"/>
           <p:cNvSpPr/>
           <p:nvPr/>
         </p:nvSpPr>
@@ -8162,7 +7963,7 @@
       </p:sp>
       <p:sp>
         <p:nvSpPr>
-          <p:cNvPr id="12" name="Rectangle 11"/>
+          <p:cNvPr id="10" name="Rectangle 9"/>
           <p:cNvSpPr/>
           <p:nvPr/>
         </p:nvSpPr>
@@ -8207,7 +8008,7 @@
       </p:sp>
       <p:sp>
         <p:nvSpPr>
-          <p:cNvPr id="13" name="TextBox 12"/>
+          <p:cNvPr id="11" name="TextBox 10"/>
           <p:cNvSpPr txBox="1"/>
           <p:nvPr/>
         </p:nvSpPr>
@@ -8242,7 +8043,7 @@
       </p:sp>
       <p:sp>
         <p:nvSpPr>
-          <p:cNvPr id="14" name="TextBox 13"/>
+          <p:cNvPr id="12" name="TextBox 11"/>
           <p:cNvSpPr txBox="1"/>
           <p:nvPr/>
         </p:nvSpPr>
@@ -8277,7 +8078,7 @@
       </p:sp>
       <p:sp>
         <p:nvSpPr>
-          <p:cNvPr id="15" name="TextBox 14"/>
+          <p:cNvPr id="13" name="TextBox 12"/>
           <p:cNvSpPr txBox="1"/>
           <p:nvPr/>
         </p:nvSpPr>
